--- a/demos/template-pptx.pptx
+++ b/demos/template-pptx.pptx
@@ -5823,7 +5823,7 @@
       </p:sp>
       <p:graphicFrame xmlns:a="http://schemas.openxmlformats.org/drawingml/2006/main" xmlns:r="http://schemas.openxmlformats.org/officeDocument/2006/relationships" xmlns:p="http://schemas.openxmlformats.org/presentationml/2006/main">
         <p:nvGraphicFramePr>
-          <p:cNvPr id="118569359" name=""/>
+          <p:cNvPr id="82154233" name=""/>
           <p:cNvGraphicFramePr>
             <a:graphicFrameLocks noGrp="true"/>
           </p:cNvGraphicFramePr>

--- a/demos/template-pptx.pptx
+++ b/demos/template-pptx.pptx
@@ -5823,7 +5823,7 @@
       </p:sp>
       <p:graphicFrame xmlns:a="http://schemas.openxmlformats.org/drawingml/2006/main" xmlns:r="http://schemas.openxmlformats.org/officeDocument/2006/relationships" xmlns:p="http://schemas.openxmlformats.org/presentationml/2006/main">
         <p:nvGraphicFramePr>
-          <p:cNvPr id="82154233" name=""/>
+          <p:cNvPr id="246535561" name=""/>
           <p:cNvGraphicFramePr>
             <a:graphicFrameLocks noGrp="true"/>
           </p:cNvGraphicFramePr>

--- a/demos/template-pptx.pptx
+++ b/demos/template-pptx.pptx
@@ -5823,7 +5823,7 @@
       </p:sp>
       <p:graphicFrame xmlns:a="http://schemas.openxmlformats.org/drawingml/2006/main" xmlns:r="http://schemas.openxmlformats.org/officeDocument/2006/relationships" xmlns:p="http://schemas.openxmlformats.org/presentationml/2006/main">
         <p:nvGraphicFramePr>
-          <p:cNvPr id="246535561" name=""/>
+          <p:cNvPr id="557760190" name=""/>
           <p:cNvGraphicFramePr>
             <a:graphicFrameLocks noGrp="true"/>
           </p:cNvGraphicFramePr>

--- a/demos/template-pptx.pptx
+++ b/demos/template-pptx.pptx
@@ -5823,7 +5823,7 @@
       </p:sp>
       <p:graphicFrame xmlns:a="http://schemas.openxmlformats.org/drawingml/2006/main" xmlns:r="http://schemas.openxmlformats.org/officeDocument/2006/relationships" xmlns:p="http://schemas.openxmlformats.org/presentationml/2006/main">
         <p:nvGraphicFramePr>
-          <p:cNvPr id="557760190" name=""/>
+          <p:cNvPr id="999043333" name=""/>
           <p:cNvGraphicFramePr>
             <a:graphicFrameLocks noGrp="true"/>
           </p:cNvGraphicFramePr>

--- a/demos/template-pptx.pptx
+++ b/demos/template-pptx.pptx
@@ -5823,7 +5823,7 @@
       </p:sp>
       <p:graphicFrame xmlns:a="http://schemas.openxmlformats.org/drawingml/2006/main" xmlns:r="http://schemas.openxmlformats.org/officeDocument/2006/relationships" xmlns:p="http://schemas.openxmlformats.org/presentationml/2006/main">
         <p:nvGraphicFramePr>
-          <p:cNvPr id="999043333" name=""/>
+          <p:cNvPr id="56585495" name=""/>
           <p:cNvGraphicFramePr>
             <a:graphicFrameLocks noGrp="true"/>
           </p:cNvGraphicFramePr>

--- a/demos/template-pptx.pptx
+++ b/demos/template-pptx.pptx
@@ -5823,7 +5823,7 @@
       </p:sp>
       <p:graphicFrame xmlns:a="http://schemas.openxmlformats.org/drawingml/2006/main" xmlns:r="http://schemas.openxmlformats.org/officeDocument/2006/relationships" xmlns:p="http://schemas.openxmlformats.org/presentationml/2006/main">
         <p:nvGraphicFramePr>
-          <p:cNvPr id="56585495" name=""/>
+          <p:cNvPr id="761998826" name=""/>
           <p:cNvGraphicFramePr>
             <a:graphicFrameLocks noGrp="true"/>
           </p:cNvGraphicFramePr>

--- a/demos/template-pptx.pptx
+++ b/demos/template-pptx.pptx
@@ -5823,7 +5823,7 @@
       </p:sp>
       <p:graphicFrame xmlns:a="http://schemas.openxmlformats.org/drawingml/2006/main" xmlns:r="http://schemas.openxmlformats.org/officeDocument/2006/relationships" xmlns:p="http://schemas.openxmlformats.org/presentationml/2006/main">
         <p:nvGraphicFramePr>
-          <p:cNvPr id="761998826" name=""/>
+          <p:cNvPr id="37974963" name=""/>
           <p:cNvGraphicFramePr>
             <a:graphicFrameLocks noGrp="true"/>
           </p:cNvGraphicFramePr>

--- a/demos/template-pptx.pptx
+++ b/demos/template-pptx.pptx
@@ -5823,7 +5823,7 @@
       </p:sp>
       <p:graphicFrame xmlns:a="http://schemas.openxmlformats.org/drawingml/2006/main" xmlns:r="http://schemas.openxmlformats.org/officeDocument/2006/relationships" xmlns:p="http://schemas.openxmlformats.org/presentationml/2006/main">
         <p:nvGraphicFramePr>
-          <p:cNvPr id="37974963" name=""/>
+          <p:cNvPr id="178596250" name=""/>
           <p:cNvGraphicFramePr>
             <a:graphicFrameLocks noGrp="true"/>
           </p:cNvGraphicFramePr>

--- a/demos/template-pptx.pptx
+++ b/demos/template-pptx.pptx
@@ -5823,7 +5823,7 @@
       </p:sp>
       <p:graphicFrame xmlns:a="http://schemas.openxmlformats.org/drawingml/2006/main" xmlns:r="http://schemas.openxmlformats.org/officeDocument/2006/relationships" xmlns:p="http://schemas.openxmlformats.org/presentationml/2006/main">
         <p:nvGraphicFramePr>
-          <p:cNvPr id="178596250" name=""/>
+          <p:cNvPr id="914160009" name=""/>
           <p:cNvGraphicFramePr>
             <a:graphicFrameLocks noGrp="true"/>
           </p:cNvGraphicFramePr>

--- a/demos/template-pptx.pptx
+++ b/demos/template-pptx.pptx
@@ -5823,7 +5823,7 @@
       </p:sp>
       <p:graphicFrame xmlns:a="http://schemas.openxmlformats.org/drawingml/2006/main" xmlns:r="http://schemas.openxmlformats.org/officeDocument/2006/relationships" xmlns:p="http://schemas.openxmlformats.org/presentationml/2006/main">
         <p:nvGraphicFramePr>
-          <p:cNvPr id="914160009" name=""/>
+          <p:cNvPr id="802215973" name=""/>
           <p:cNvGraphicFramePr>
             <a:graphicFrameLocks noGrp="true"/>
           </p:cNvGraphicFramePr>

--- a/demos/template-pptx.pptx
+++ b/demos/template-pptx.pptx
@@ -5823,7 +5823,7 @@
       </p:sp>
       <p:graphicFrame xmlns:a="http://schemas.openxmlformats.org/drawingml/2006/main" xmlns:r="http://schemas.openxmlformats.org/officeDocument/2006/relationships" xmlns:p="http://schemas.openxmlformats.org/presentationml/2006/main">
         <p:nvGraphicFramePr>
-          <p:cNvPr id="802215973" name=""/>
+          <p:cNvPr id="985267020" name=""/>
           <p:cNvGraphicFramePr>
             <a:graphicFrameLocks noGrp="true"/>
           </p:cNvGraphicFramePr>

--- a/demos/template-pptx.pptx
+++ b/demos/template-pptx.pptx
@@ -5823,7 +5823,7 @@
       </p:sp>
       <p:graphicFrame xmlns:a="http://schemas.openxmlformats.org/drawingml/2006/main" xmlns:r="http://schemas.openxmlformats.org/officeDocument/2006/relationships" xmlns:p="http://schemas.openxmlformats.org/presentationml/2006/main">
         <p:nvGraphicFramePr>
-          <p:cNvPr id="985267020" name=""/>
+          <p:cNvPr id="286620040" name=""/>
           <p:cNvGraphicFramePr>
             <a:graphicFrameLocks noGrp="true"/>
           </p:cNvGraphicFramePr>

--- a/demos/template-pptx.pptx
+++ b/demos/template-pptx.pptx
@@ -5823,7 +5823,7 @@
       </p:sp>
       <p:graphicFrame xmlns:a="http://schemas.openxmlformats.org/drawingml/2006/main" xmlns:r="http://schemas.openxmlformats.org/officeDocument/2006/relationships" xmlns:p="http://schemas.openxmlformats.org/presentationml/2006/main">
         <p:nvGraphicFramePr>
-          <p:cNvPr id="286620040" name=""/>
+          <p:cNvPr id="907037555" name=""/>
           <p:cNvGraphicFramePr>
             <a:graphicFrameLocks noGrp="true"/>
           </p:cNvGraphicFramePr>

--- a/demos/template-pptx.pptx
+++ b/demos/template-pptx.pptx
@@ -5823,7 +5823,7 @@
       </p:sp>
       <p:graphicFrame xmlns:a="http://schemas.openxmlformats.org/drawingml/2006/main" xmlns:r="http://schemas.openxmlformats.org/officeDocument/2006/relationships" xmlns:p="http://schemas.openxmlformats.org/presentationml/2006/main">
         <p:nvGraphicFramePr>
-          <p:cNvPr id="907037555" name=""/>
+          <p:cNvPr id="726101226" name=""/>
           <p:cNvGraphicFramePr>
             <a:graphicFrameLocks noGrp="true"/>
           </p:cNvGraphicFramePr>

--- a/demos/template-pptx.pptx
+++ b/demos/template-pptx.pptx
@@ -5823,7 +5823,7 @@
       </p:sp>
       <p:graphicFrame xmlns:a="http://schemas.openxmlformats.org/drawingml/2006/main" xmlns:r="http://schemas.openxmlformats.org/officeDocument/2006/relationships" xmlns:p="http://schemas.openxmlformats.org/presentationml/2006/main">
         <p:nvGraphicFramePr>
-          <p:cNvPr id="726101226" name=""/>
+          <p:cNvPr id="242679309" name=""/>
           <p:cNvGraphicFramePr>
             <a:graphicFrameLocks noGrp="true"/>
           </p:cNvGraphicFramePr>

--- a/demos/template-pptx.pptx
+++ b/demos/template-pptx.pptx
@@ -5823,7 +5823,7 @@
       </p:sp>
       <p:graphicFrame xmlns:a="http://schemas.openxmlformats.org/drawingml/2006/main" xmlns:r="http://schemas.openxmlformats.org/officeDocument/2006/relationships" xmlns:p="http://schemas.openxmlformats.org/presentationml/2006/main">
         <p:nvGraphicFramePr>
-          <p:cNvPr id="242679309" name=""/>
+          <p:cNvPr id="74020879" name=""/>
           <p:cNvGraphicFramePr>
             <a:graphicFrameLocks noGrp="true"/>
           </p:cNvGraphicFramePr>

--- a/demos/template-pptx.pptx
+++ b/demos/template-pptx.pptx
@@ -5823,7 +5823,7 @@
       </p:sp>
       <p:graphicFrame xmlns:a="http://schemas.openxmlformats.org/drawingml/2006/main" xmlns:r="http://schemas.openxmlformats.org/officeDocument/2006/relationships" xmlns:p="http://schemas.openxmlformats.org/presentationml/2006/main">
         <p:nvGraphicFramePr>
-          <p:cNvPr id="74020879" name=""/>
+          <p:cNvPr id="675967906" name=""/>
           <p:cNvGraphicFramePr>
             <a:graphicFrameLocks noGrp="true"/>
           </p:cNvGraphicFramePr>

--- a/demos/template-pptx.pptx
+++ b/demos/template-pptx.pptx
@@ -5823,7 +5823,7 @@
       </p:sp>
       <p:graphicFrame xmlns:a="http://schemas.openxmlformats.org/drawingml/2006/main" xmlns:r="http://schemas.openxmlformats.org/officeDocument/2006/relationships" xmlns:p="http://schemas.openxmlformats.org/presentationml/2006/main">
         <p:nvGraphicFramePr>
-          <p:cNvPr id="675967906" name=""/>
+          <p:cNvPr id="275342925" name=""/>
           <p:cNvGraphicFramePr>
             <a:graphicFrameLocks noGrp="true"/>
           </p:cNvGraphicFramePr>

--- a/demos/template-pptx.pptx
+++ b/demos/template-pptx.pptx
@@ -5823,7 +5823,7 @@
       </p:sp>
       <p:graphicFrame xmlns:a="http://schemas.openxmlformats.org/drawingml/2006/main" xmlns:r="http://schemas.openxmlformats.org/officeDocument/2006/relationships" xmlns:p="http://schemas.openxmlformats.org/presentationml/2006/main">
         <p:nvGraphicFramePr>
-          <p:cNvPr id="275342925" name=""/>
+          <p:cNvPr id="277708471" name=""/>
           <p:cNvGraphicFramePr>
             <a:graphicFrameLocks noGrp="true"/>
           </p:cNvGraphicFramePr>

--- a/demos/template-pptx.pptx
+++ b/demos/template-pptx.pptx
@@ -5823,7 +5823,7 @@
       </p:sp>
       <p:graphicFrame xmlns:a="http://schemas.openxmlformats.org/drawingml/2006/main" xmlns:r="http://schemas.openxmlformats.org/officeDocument/2006/relationships" xmlns:p="http://schemas.openxmlformats.org/presentationml/2006/main">
         <p:nvGraphicFramePr>
-          <p:cNvPr id="277708471" name=""/>
+          <p:cNvPr id="662246378" name=""/>
           <p:cNvGraphicFramePr>
             <a:graphicFrameLocks noGrp="true"/>
           </p:cNvGraphicFramePr>

--- a/demos/template-pptx.pptx
+++ b/demos/template-pptx.pptx
@@ -5823,7 +5823,7 @@
       </p:sp>
       <p:graphicFrame xmlns:a="http://schemas.openxmlformats.org/drawingml/2006/main" xmlns:r="http://schemas.openxmlformats.org/officeDocument/2006/relationships" xmlns:p="http://schemas.openxmlformats.org/presentationml/2006/main">
         <p:nvGraphicFramePr>
-          <p:cNvPr id="662246378" name=""/>
+          <p:cNvPr id="657007931" name=""/>
           <p:cNvGraphicFramePr>
             <a:graphicFrameLocks noGrp="true"/>
           </p:cNvGraphicFramePr>

--- a/demos/template-pptx.pptx
+++ b/demos/template-pptx.pptx
@@ -5823,7 +5823,7 @@
       </p:sp>
       <p:graphicFrame xmlns:a="http://schemas.openxmlformats.org/drawingml/2006/main" xmlns:r="http://schemas.openxmlformats.org/officeDocument/2006/relationships" xmlns:p="http://schemas.openxmlformats.org/presentationml/2006/main">
         <p:nvGraphicFramePr>
-          <p:cNvPr id="657007931" name=""/>
+          <p:cNvPr id="415367099" name=""/>
           <p:cNvGraphicFramePr>
             <a:graphicFrameLocks noGrp="true"/>
           </p:cNvGraphicFramePr>
